--- a/product/01_taikenkai-kit/src/a4_flyer.pptx
+++ b/product/01_taikenkai-kit/src/a4_flyer.pptx
@@ -4407,7 +4407,7 @@
                 <a:ea typeface="Zen Maru Gothic"/>
                 <a:cs typeface="Zen Maru Gothic"/>
               </a:rPr>
-              <a:t>おえかき教室 そらいろ</a:t>
+              <a:t>○○おえかき教室</a:t>
             </a:r>
           </a:p>
         </p:txBody>
@@ -4421,7 +4421,7 @@
         <p:spPr>
           <a:xfrm>
             <a:off x="540000" y="3132000"/>
-            <a:ext cx="6480000" cy="2808000"/>
+            <a:ext cx="6480000" cy="2448000"/>
           </a:xfrm>
           <a:prstGeom prst="roundRect">
             <a:avLst>
@@ -4450,7 +4450,7 @@
         <p:spPr>
           <a:xfrm>
             <a:off x="540000" y="3132000"/>
-            <a:ext cx="6480000" cy="2808000"/>
+            <a:ext cx="6480000" cy="2448000"/>
           </a:xfrm>
           <a:prstGeom prst="rect">
             <a:avLst/>
@@ -4490,7 +4490,7 @@
         </p:nvSpPr>
         <p:spPr>
           <a:xfrm>
-            <a:off x="540000" y="6192000"/>
+            <a:off x="540000" y="5796000"/>
             <a:ext cx="6480000" cy="864000"/>
           </a:xfrm>
           <a:prstGeom prst="roundRect">
@@ -4519,7 +4519,7 @@
         </p:nvSpPr>
         <p:spPr>
           <a:xfrm>
-            <a:off x="540000" y="6264000"/>
+            <a:off x="540000" y="5868000"/>
             <a:ext cx="6480000" cy="432000"/>
           </a:xfrm>
           <a:prstGeom prst="rect">
@@ -4560,7 +4560,7 @@
         </p:nvSpPr>
         <p:spPr>
           <a:xfrm>
-            <a:off x="540000" y="6696000"/>
+            <a:off x="540000" y="6300000"/>
             <a:ext cx="6480000" cy="288000"/>
           </a:xfrm>
           <a:prstGeom prst="rect">
@@ -4580,7 +4580,7 @@
               </a:lnSpc>
             </a:pPr>
             <a:r>
-              <a:rPr sz="1200" b="0">
+              <a:rPr sz="1300" b="1">
                 <a:solidFill>
                   <a:srgbClr val="FFFFFF"/>
                 </a:solidFill>
@@ -4601,8 +4601,8 @@
         </p:nvSpPr>
         <p:spPr>
           <a:xfrm>
-            <a:off x="540000" y="7344000"/>
-            <a:ext cx="792000" cy="252000"/>
+            <a:off x="540000" y="6876000"/>
+            <a:ext cx="864000" cy="288000"/>
           </a:xfrm>
           <a:prstGeom prst="roundRect">
             <a:avLst>
@@ -4630,8 +4630,8 @@
         </p:nvSpPr>
         <p:spPr>
           <a:xfrm>
-            <a:off x="540000" y="7344000"/>
-            <a:ext cx="792000" cy="252000"/>
+            <a:off x="540000" y="6876000"/>
+            <a:ext cx="864000" cy="288000"/>
           </a:xfrm>
           <a:prstGeom prst="rect">
             <a:avLst/>
@@ -4650,48 +4650,7 @@
               </a:lnSpc>
             </a:pPr>
             <a:r>
-              <a:rPr sz="1000" b="1">
-                <a:solidFill>
-                  <a:srgbClr val="2A8C99"/>
-                </a:solidFill>
-                <a:latin typeface="Zen Maru Gothic"/>
-                <a:ea typeface="Zen Maru Gothic"/>
-                <a:cs typeface="Zen Maru Gothic"/>
-              </a:rPr>
-              <a:t>対象</a:t>
-            </a:r>
-          </a:p>
-        </p:txBody>
-      </p:sp>
-      <p:sp>
-        <p:nvSpPr>
-          <p:cNvPr id="19" name="内容_対象"/>
-          <p:cNvSpPr txBox="1"/>
-          <p:nvPr/>
-        </p:nvSpPr>
-        <p:spPr>
-          <a:xfrm>
-            <a:off x="1476000" y="7365600"/>
-            <a:ext cx="4032000" cy="432000"/>
-          </a:xfrm>
-          <a:prstGeom prst="rect">
-            <a:avLst/>
-          </a:prstGeom>
-          <a:noFill/>
-        </p:spPr>
-        <p:txBody>
-          <a:bodyPr wrap="square" lIns="0" rIns="0" tIns="0" bIns="0" anchor="t">
-            <a:spAutoFit/>
-          </a:bodyPr>
-          <a:lstStyle/>
-          <a:p>
-            <a:pPr algn="l">
-              <a:lnSpc>
-                <a:spcPct val="120000"/>
-              </a:lnSpc>
-            </a:pPr>
-            <a:r>
-              <a:rPr sz="1050" b="0">
+              <a:rPr sz="1100" b="1">
                 <a:solidFill>
                   <a:srgbClr val="2F3B40"/>
                 </a:solidFill>
@@ -4699,7 +4658,48 @@
                 <a:ea typeface="Zen Maru Gothic"/>
                 <a:cs typeface="Zen Maru Gothic"/>
               </a:rPr>
-              <a:t>3〜6さい（未就学のお子さん）</a:t>
+              <a:t>対象</a:t>
+            </a:r>
+          </a:p>
+        </p:txBody>
+      </p:sp>
+      <p:sp>
+        <p:nvSpPr>
+          <p:cNvPr id="19" name="内容_対象"/>
+          <p:cNvSpPr txBox="1"/>
+          <p:nvPr/>
+        </p:nvSpPr>
+        <p:spPr>
+          <a:xfrm>
+            <a:off x="1584000" y="6908400"/>
+            <a:ext cx="5040000" cy="324000"/>
+          </a:xfrm>
+          <a:prstGeom prst="rect">
+            <a:avLst/>
+          </a:prstGeom>
+          <a:noFill/>
+        </p:spPr>
+        <p:txBody>
+          <a:bodyPr wrap="square" lIns="0" rIns="0" tIns="0" bIns="0" anchor="t">
+            <a:spAutoFit/>
+          </a:bodyPr>
+          <a:lstStyle/>
+          <a:p>
+            <a:pPr algn="l">
+              <a:lnSpc>
+                <a:spcPct val="120000"/>
+              </a:lnSpc>
+            </a:pPr>
+            <a:r>
+              <a:rPr sz="1200" b="0">
+                <a:solidFill>
+                  <a:srgbClr val="2F3B40"/>
+                </a:solidFill>
+                <a:latin typeface="Zen Maru Gothic"/>
+                <a:ea typeface="Zen Maru Gothic"/>
+                <a:cs typeface="Zen Maru Gothic"/>
+              </a:rPr>
+              <a:t>3さい〜年長さん</a:t>
             </a:r>
           </a:p>
         </p:txBody>
@@ -4712,8 +4712,8 @@
         </p:nvSpPr>
         <p:spPr>
           <a:xfrm>
-            <a:off x="540000" y="7704000"/>
-            <a:ext cx="792000" cy="252000"/>
+            <a:off x="540000" y="7254000"/>
+            <a:ext cx="864000" cy="288000"/>
           </a:xfrm>
           <a:prstGeom prst="roundRect">
             <a:avLst>
@@ -4741,8 +4741,8 @@
         </p:nvSpPr>
         <p:spPr>
           <a:xfrm>
-            <a:off x="540000" y="7704000"/>
-            <a:ext cx="792000" cy="252000"/>
+            <a:off x="540000" y="7254000"/>
+            <a:ext cx="864000" cy="288000"/>
           </a:xfrm>
           <a:prstGeom prst="rect">
             <a:avLst/>
@@ -4761,9 +4761,9 @@
               </a:lnSpc>
             </a:pPr>
             <a:r>
-              <a:rPr sz="1000" b="1">
+              <a:rPr sz="1100" b="1">
                 <a:solidFill>
-                  <a:srgbClr val="2A8C99"/>
+                  <a:srgbClr val="2F3B40"/>
                 </a:solidFill>
                 <a:latin typeface="Zen Maru Gothic"/>
                 <a:ea typeface="Zen Maru Gothic"/>
@@ -4782,8 +4782,8 @@
         </p:nvSpPr>
         <p:spPr>
           <a:xfrm>
-            <a:off x="1476000" y="7725600"/>
-            <a:ext cx="4032000" cy="432000"/>
+            <a:off x="1584000" y="7286400"/>
+            <a:ext cx="5040000" cy="324000"/>
           </a:xfrm>
           <a:prstGeom prst="rect">
             <a:avLst/>
@@ -4802,7 +4802,7 @@
               </a:lnSpc>
             </a:pPr>
             <a:r>
-              <a:rPr sz="1050" b="0">
+              <a:rPr sz="1200" b="0">
                 <a:solidFill>
                   <a:srgbClr val="2F3B40"/>
                 </a:solidFill>
@@ -4823,8 +4823,8 @@
         </p:nvSpPr>
         <p:spPr>
           <a:xfrm>
-            <a:off x="540000" y="8064000"/>
-            <a:ext cx="792000" cy="252000"/>
+            <a:off x="540000" y="7632000"/>
+            <a:ext cx="864000" cy="288000"/>
           </a:xfrm>
           <a:prstGeom prst="roundRect">
             <a:avLst>
@@ -4852,8 +4852,8 @@
         </p:nvSpPr>
         <p:spPr>
           <a:xfrm>
-            <a:off x="540000" y="8064000"/>
-            <a:ext cx="792000" cy="252000"/>
+            <a:off x="540000" y="7632000"/>
+            <a:ext cx="864000" cy="288000"/>
           </a:xfrm>
           <a:prstGeom prst="rect">
             <a:avLst/>
@@ -4872,9 +4872,9 @@
               </a:lnSpc>
             </a:pPr>
             <a:r>
-              <a:rPr sz="1000" b="1">
+              <a:rPr sz="1100" b="1">
                 <a:solidFill>
-                  <a:srgbClr val="2A8C99"/>
+                  <a:srgbClr val="2F3B40"/>
                 </a:solidFill>
                 <a:latin typeface="Zen Maru Gothic"/>
                 <a:ea typeface="Zen Maru Gothic"/>
@@ -4893,8 +4893,8 @@
         </p:nvSpPr>
         <p:spPr>
           <a:xfrm>
-            <a:off x="1476000" y="8085600"/>
-            <a:ext cx="4032000" cy="432000"/>
+            <a:off x="1584000" y="7664400"/>
+            <a:ext cx="5040000" cy="324000"/>
           </a:xfrm>
           <a:prstGeom prst="rect">
             <a:avLst/>
@@ -4913,7 +4913,7 @@
               </a:lnSpc>
             </a:pPr>
             <a:r>
-              <a:rPr sz="1050" b="0">
+              <a:rPr sz="1200" b="0">
                 <a:solidFill>
                   <a:srgbClr val="2F3B40"/>
                 </a:solidFill>
@@ -4934,8 +4934,8 @@
         </p:nvSpPr>
         <p:spPr>
           <a:xfrm>
-            <a:off x="540000" y="8424000"/>
-            <a:ext cx="792000" cy="252000"/>
+            <a:off x="540000" y="8010000"/>
+            <a:ext cx="864000" cy="288000"/>
           </a:xfrm>
           <a:prstGeom prst="roundRect">
             <a:avLst>
@@ -4963,8 +4963,8 @@
         </p:nvSpPr>
         <p:spPr>
           <a:xfrm>
-            <a:off x="540000" y="8424000"/>
-            <a:ext cx="792000" cy="252000"/>
+            <a:off x="540000" y="8010000"/>
+            <a:ext cx="864000" cy="288000"/>
           </a:xfrm>
           <a:prstGeom prst="rect">
             <a:avLst/>
@@ -4983,9 +4983,9 @@
               </a:lnSpc>
             </a:pPr>
             <a:r>
-              <a:rPr sz="1000" b="1">
+              <a:rPr sz="1100" b="1">
                 <a:solidFill>
-                  <a:srgbClr val="2A8C99"/>
+                  <a:srgbClr val="2F3B40"/>
                 </a:solidFill>
                 <a:latin typeface="Zen Maru Gothic"/>
                 <a:ea typeface="Zen Maru Gothic"/>
@@ -5004,8 +5004,8 @@
         </p:nvSpPr>
         <p:spPr>
           <a:xfrm>
-            <a:off x="1476000" y="8445600"/>
-            <a:ext cx="4032000" cy="432000"/>
+            <a:off x="1584000" y="8042400"/>
+            <a:ext cx="5040000" cy="324000"/>
           </a:xfrm>
           <a:prstGeom prst="rect">
             <a:avLst/>
@@ -5024,7 +5024,7 @@
               </a:lnSpc>
             </a:pPr>
             <a:r>
-              <a:rPr sz="1050" b="0">
+              <a:rPr sz="1200" b="0">
                 <a:solidFill>
                   <a:srgbClr val="2F3B40"/>
                 </a:solidFill>
@@ -5045,8 +5045,8 @@
         </p:nvSpPr>
         <p:spPr>
           <a:xfrm>
-            <a:off x="540000" y="8784000"/>
-            <a:ext cx="792000" cy="252000"/>
+            <a:off x="540000" y="8388000"/>
+            <a:ext cx="864000" cy="288000"/>
           </a:xfrm>
           <a:prstGeom prst="roundRect">
             <a:avLst>
@@ -5074,8 +5074,8 @@
         </p:nvSpPr>
         <p:spPr>
           <a:xfrm>
-            <a:off x="540000" y="8784000"/>
-            <a:ext cx="792000" cy="252000"/>
+            <a:off x="540000" y="8388000"/>
+            <a:ext cx="864000" cy="288000"/>
           </a:xfrm>
           <a:prstGeom prst="rect">
             <a:avLst/>
@@ -5094,9 +5094,9 @@
               </a:lnSpc>
             </a:pPr>
             <a:r>
-              <a:rPr sz="1000" b="1">
+              <a:rPr sz="1100" b="1">
                 <a:solidFill>
-                  <a:srgbClr val="2A8C99"/>
+                  <a:srgbClr val="2F3B40"/>
                 </a:solidFill>
                 <a:latin typeface="Zen Maru Gothic"/>
                 <a:ea typeface="Zen Maru Gothic"/>
@@ -5115,8 +5115,8 @@
         </p:nvSpPr>
         <p:spPr>
           <a:xfrm>
-            <a:off x="1476000" y="8805600"/>
-            <a:ext cx="4032000" cy="432000"/>
+            <a:off x="1584000" y="8420400"/>
+            <a:ext cx="5040000" cy="324000"/>
           </a:xfrm>
           <a:prstGeom prst="rect">
             <a:avLst/>
@@ -5135,7 +5135,7 @@
               </a:lnSpc>
             </a:pPr>
             <a:r>
-              <a:rPr sz="1050" b="0">
+              <a:rPr sz="1200" b="0">
                 <a:solidFill>
                   <a:srgbClr val="2F3B40"/>
                 </a:solidFill>
@@ -5156,8 +5156,8 @@
         </p:nvSpPr>
         <p:spPr>
           <a:xfrm>
-            <a:off x="540000" y="9144000"/>
-            <a:ext cx="792000" cy="252000"/>
+            <a:off x="540000" y="8766000"/>
+            <a:ext cx="864000" cy="288000"/>
           </a:xfrm>
           <a:prstGeom prst="roundRect">
             <a:avLst>
@@ -5185,8 +5185,8 @@
         </p:nvSpPr>
         <p:spPr>
           <a:xfrm>
-            <a:off x="540000" y="9144000"/>
-            <a:ext cx="792000" cy="252000"/>
+            <a:off x="540000" y="8766000"/>
+            <a:ext cx="864000" cy="288000"/>
           </a:xfrm>
           <a:prstGeom prst="rect">
             <a:avLst/>
@@ -5205,48 +5205,7 @@
               </a:lnSpc>
             </a:pPr>
             <a:r>
-              <a:rPr sz="1000" b="1">
-                <a:solidFill>
-                  <a:srgbClr val="2A8C99"/>
-                </a:solidFill>
-                <a:latin typeface="Zen Maru Gothic"/>
-                <a:ea typeface="Zen Maru Gothic"/>
-                <a:cs typeface="Zen Maru Gothic"/>
-              </a:rPr>
-              <a:t>場所</a:t>
-            </a:r>
-          </a:p>
-        </p:txBody>
-      </p:sp>
-      <p:sp>
-        <p:nvSpPr>
-          <p:cNvPr id="34" name="内容_場所"/>
-          <p:cNvSpPr txBox="1"/>
-          <p:nvPr/>
-        </p:nvSpPr>
-        <p:spPr>
-          <a:xfrm>
-            <a:off x="1476000" y="9165600"/>
-            <a:ext cx="4032000" cy="432000"/>
-          </a:xfrm>
-          <a:prstGeom prst="rect">
-            <a:avLst/>
-          </a:prstGeom>
-          <a:noFill/>
-        </p:spPr>
-        <p:txBody>
-          <a:bodyPr wrap="square" lIns="0" rIns="0" tIns="0" bIns="0" anchor="t">
-            <a:spAutoFit/>
-          </a:bodyPr>
-          <a:lstStyle/>
-          <a:p>
-            <a:pPr algn="l">
-              <a:lnSpc>
-                <a:spcPct val="120000"/>
-              </a:lnSpc>
-            </a:pPr>
-            <a:r>
-              <a:rPr sz="1050" b="0">
+              <a:rPr sz="1100" b="1">
                 <a:solidFill>
                   <a:srgbClr val="2F3B40"/>
                 </a:solidFill>
@@ -5254,25 +5213,66 @@
                 <a:ea typeface="Zen Maru Gothic"/>
                 <a:cs typeface="Zen Maru Gothic"/>
               </a:rPr>
-              <a:t>○○市○○町（くわしい場所はお申し込み後にお知らせします）</a:t>
-            </a:r>
-          </a:p>
-        </p:txBody>
-      </p:sp>
-      <p:sp>
-        <p:nvSpPr>
-          <p:cNvPr id="35" name="申込枠"/>
+              <a:t>場所</a:t>
+            </a:r>
+          </a:p>
+        </p:txBody>
+      </p:sp>
+      <p:sp>
+        <p:nvSpPr>
+          <p:cNvPr id="34" name="内容_場所"/>
+          <p:cNvSpPr txBox="1"/>
+          <p:nvPr/>
+        </p:nvSpPr>
+        <p:spPr>
+          <a:xfrm>
+            <a:off x="1584000" y="8798400"/>
+            <a:ext cx="5040000" cy="324000"/>
+          </a:xfrm>
+          <a:prstGeom prst="rect">
+            <a:avLst/>
+          </a:prstGeom>
+          <a:noFill/>
+        </p:spPr>
+        <p:txBody>
+          <a:bodyPr wrap="square" lIns="0" rIns="0" tIns="0" bIns="0" anchor="t">
+            <a:spAutoFit/>
+          </a:bodyPr>
+          <a:lstStyle/>
+          <a:p>
+            <a:pPr algn="l">
+              <a:lnSpc>
+                <a:spcPct val="120000"/>
+              </a:lnSpc>
+            </a:pPr>
+            <a:r>
+              <a:rPr sz="1200" b="0">
+                <a:solidFill>
+                  <a:srgbClr val="2F3B40"/>
+                </a:solidFill>
+                <a:latin typeface="Zen Maru Gothic"/>
+                <a:ea typeface="Zen Maru Gothic"/>
+                <a:cs typeface="Zen Maru Gothic"/>
+              </a:rPr>
+              <a:t>○○市○○町（くわしくはお申し込み後に）</a:t>
+            </a:r>
+          </a:p>
+        </p:txBody>
+      </p:sp>
+      <p:sp>
+        <p:nvSpPr>
+          <p:cNvPr id="35" name="申し込み枠"/>
           <p:cNvSpPr/>
           <p:nvPr/>
         </p:nvSpPr>
         <p:spPr>
           <a:xfrm>
-            <a:off x="540000" y="9576000"/>
-            <a:ext cx="5040000" cy="684000"/>
+            <a:off x="540000" y="9216000"/>
+            <a:ext cx="5148000" cy="900000"/>
           </a:xfrm>
           <a:prstGeom prst="roundRect">
             <a:avLst>
-              <a:gd name="adj" fmla="val 25000"/>
+              <a:gd name="adj" fmla="val 20000"/>
             </a:avLst>
           </a:prstGeom>
           <a:solidFill>
@@ -5292,14 +5292,14 @@
       </p:sp>
       <p:sp>
         <p:nvSpPr>
-          <p:cNvPr id="36" name="申込方法"/>
+          <p:cNvPr id="36" name="申し込み方法"/>
           <p:cNvSpPr txBox="1"/>
           <p:nvPr/>
         </p:nvSpPr>
         <p:spPr>
           <a:xfrm>
-            <a:off x="720000" y="9666000"/>
-            <a:ext cx="4752000" cy="576000"/>
+            <a:off x="720000" y="9306000"/>
+            <a:ext cx="4860000" cy="864000"/>
           </a:xfrm>
           <a:prstGeom prst="rect">
             <a:avLst/>
@@ -5314,29 +5314,29 @@
           <a:p>
             <a:pPr algn="l">
               <a:lnSpc>
-                <a:spcPct val="120000"/>
+                <a:spcPct val="125000"/>
               </a:lnSpc>
             </a:pPr>
             <a:r>
-              <a:rPr sz="1050" b="1">
+              <a:rPr sz="1100" b="1">
                 <a:solidFill>
-                  <a:srgbClr val="2A8C99"/>
+                  <a:srgbClr val="2F3B40"/>
                 </a:solidFill>
                 <a:latin typeface="Zen Maru Gothic"/>
                 <a:ea typeface="Zen Maru Gothic"/>
                 <a:cs typeface="Zen Maru Gothic"/>
               </a:rPr>
-              <a:t>お申し込み　しめきり：1月9日（土）</a:t>
+              <a:t>お申し込み方法　／　しめきり：1月9日（土）</a:t>
             </a:r>
           </a:p>
           <a:p>
             <a:pPr algn="l">
               <a:lnSpc>
-                <a:spcPct val="120000"/>
+                <a:spcPct val="125000"/>
               </a:lnSpc>
             </a:pPr>
             <a:r>
-              <a:rPr sz="950" b="0">
+              <a:rPr sz="1100" b="0">
                 <a:solidFill>
                   <a:srgbClr val="2F3B40"/>
                 </a:solidFill>
@@ -5347,6 +5347,24 @@
               <a:t>InstagramのDMかLINEで、「お名前・年齢・希望日」を送ってください</a:t>
             </a:r>
           </a:p>
+          <a:p>
+            <a:pPr algn="l">
+              <a:lnSpc>
+                <a:spcPct val="125000"/>
+              </a:lnSpc>
+            </a:pPr>
+            <a:r>
+              <a:rPr sz="1000" b="0">
+                <a:solidFill>
+                  <a:srgbClr val="2F3B40"/>
+                </a:solidFill>
+                <a:latin typeface="Zen Maru Gothic"/>
+                <a:ea typeface="Zen Maru Gothic"/>
+                <a:cs typeface="Zen Maru Gothic"/>
+              </a:rPr>
+              <a:t>見学だけ、保護者の方のご相談だけでも大丈夫です</a:t>
+            </a:r>
+          </a:p>
         </p:txBody>
       </p:sp>
       <p:sp>
@@ -5357,8 +5375,8 @@
         </p:nvSpPr>
         <p:spPr>
           <a:xfrm>
-            <a:off x="5868000" y="9180000"/>
-            <a:ext cx="1152000" cy="1152000"/>
+            <a:off x="5904000" y="9072000"/>
+            <a:ext cx="1044000" cy="1044000"/>
           </a:xfrm>
           <a:prstGeom prst="roundRect">
             <a:avLst>
@@ -5388,8 +5406,8 @@
         </p:nvSpPr>
         <p:spPr>
           <a:xfrm>
-            <a:off x="5868000" y="9180000"/>
-            <a:ext cx="1152000" cy="1152000"/>
+            <a:off x="5904000" y="9072000"/>
+            <a:ext cx="1044000" cy="1044000"/>
           </a:xfrm>
           <a:prstGeom prst="rect">
             <a:avLst/>
@@ -5408,66 +5426,7 @@
               </a:lnSpc>
             </a:pPr>
             <a:r>
-              <a:rPr sz="900" b="0">
-                <a:solidFill>
-                  <a:srgbClr val="2A8C99"/>
-                </a:solidFill>
-                <a:latin typeface="Zen Maru Gothic"/>
-                <a:ea typeface="Zen Maru Gothic"/>
-                <a:cs typeface="Zen Maru Gothic"/>
-              </a:rPr>
-              <a:t>QRコード</a:t>
-            </a:r>
-          </a:p>
-          <a:p>
-            <a:pPr algn="ctr">
-              <a:lnSpc>
-                <a:spcPct val="125000"/>
-              </a:lnSpc>
-            </a:pPr>
-            <a:r>
-              <a:rPr sz="900" b="0">
-                <a:solidFill>
-                  <a:srgbClr val="2A8C99"/>
-                </a:solidFill>
-                <a:latin typeface="Zen Maru Gothic"/>
-                <a:ea typeface="Zen Maru Gothic"/>
-                <a:cs typeface="Zen Maru Gothic"/>
-              </a:rPr>
-              <a:t>を置く</a:t>
-            </a:r>
-          </a:p>
-        </p:txBody>
-      </p:sp>
-      <p:sp>
-        <p:nvSpPr>
-          <p:cNvPr id="39" name="ひとこと"/>
-          <p:cNvSpPr txBox="1"/>
-          <p:nvPr/>
-        </p:nvSpPr>
-        <p:spPr>
-          <a:xfrm>
-            <a:off x="540000" y="10386000"/>
-            <a:ext cx="5040000" cy="180000"/>
-          </a:xfrm>
-          <a:prstGeom prst="rect">
-            <a:avLst/>
-          </a:prstGeom>
-          <a:noFill/>
-        </p:spPr>
-        <p:txBody>
-          <a:bodyPr wrap="square" lIns="0" rIns="0" tIns="0" bIns="0" anchor="t">
-            <a:spAutoFit/>
-          </a:bodyPr>
-          <a:lstStyle/>
-          <a:p>
-            <a:pPr algn="l">
-              <a:lnSpc>
-                <a:spcPct val="125000"/>
-              </a:lnSpc>
-            </a:pPr>
-            <a:r>
-              <a:rPr sz="850" b="0">
+              <a:rPr sz="1000" b="0">
                 <a:solidFill>
                   <a:srgbClr val="2F3B40"/>
                 </a:solidFill>
@@ -5475,7 +5434,25 @@
                 <a:ea typeface="Zen Maru Gothic"/>
                 <a:cs typeface="Zen Maru Gothic"/>
               </a:rPr>
-              <a:t>見学だけ、保護者の方のご相談だけでも大丈夫です</a:t>
+              <a:t>QRコード</a:t>
+            </a:r>
+          </a:p>
+          <a:p>
+            <a:pPr algn="ctr">
+              <a:lnSpc>
+                <a:spcPct val="125000"/>
+              </a:lnSpc>
+            </a:pPr>
+            <a:r>
+              <a:rPr sz="1000" b="0">
+                <a:solidFill>
+                  <a:srgbClr val="2F3B40"/>
+                </a:solidFill>
+                <a:latin typeface="Zen Maru Gothic"/>
+                <a:ea typeface="Zen Maru Gothic"/>
+                <a:cs typeface="Zen Maru Gothic"/>
+              </a:rPr>
+              <a:t>を置く</a:t>
             </a:r>
           </a:p>
         </p:txBody>
@@ -6326,7 +6303,7 @@
                 <a:ea typeface="Zen Maru Gothic"/>
                 <a:cs typeface="Zen Maru Gothic"/>
               </a:rPr>
-              <a:t>おえかき教室 そらいろ</a:t>
+              <a:t>○○おえかき教室</a:t>
             </a:r>
           </a:p>
         </p:txBody>
@@ -6340,7 +6317,7 @@
         <p:spPr>
           <a:xfrm>
             <a:off x="540000" y="3132000"/>
-            <a:ext cx="6480000" cy="2808000"/>
+            <a:ext cx="6480000" cy="2448000"/>
           </a:xfrm>
           <a:prstGeom prst="roundRect">
             <a:avLst>
@@ -6369,7 +6346,7 @@
         <p:spPr>
           <a:xfrm>
             <a:off x="540000" y="3132000"/>
-            <a:ext cx="6480000" cy="2808000"/>
+            <a:ext cx="6480000" cy="2448000"/>
           </a:xfrm>
           <a:prstGeom prst="rect">
             <a:avLst/>
@@ -6409,7 +6386,7 @@
         </p:nvSpPr>
         <p:spPr>
           <a:xfrm>
-            <a:off x="540000" y="6192000"/>
+            <a:off x="540000" y="5796000"/>
             <a:ext cx="6480000" cy="864000"/>
           </a:xfrm>
           <a:prstGeom prst="roundRect">
@@ -6438,7 +6415,7 @@
         </p:nvSpPr>
         <p:spPr>
           <a:xfrm>
-            <a:off x="540000" y="6264000"/>
+            <a:off x="540000" y="5868000"/>
             <a:ext cx="6480000" cy="432000"/>
           </a:xfrm>
           <a:prstGeom prst="rect">
@@ -6479,7 +6456,7 @@
         </p:nvSpPr>
         <p:spPr>
           <a:xfrm>
-            <a:off x="540000" y="6696000"/>
+            <a:off x="540000" y="6300000"/>
             <a:ext cx="6480000" cy="288000"/>
           </a:xfrm>
           <a:prstGeom prst="rect">
@@ -6499,7 +6476,7 @@
               </a:lnSpc>
             </a:pPr>
             <a:r>
-              <a:rPr sz="1200" b="0">
+              <a:rPr sz="1300" b="1">
                 <a:solidFill>
                   <a:srgbClr val="FFFFFF"/>
                 </a:solidFill>
@@ -6520,8 +6497,8 @@
         </p:nvSpPr>
         <p:spPr>
           <a:xfrm>
-            <a:off x="540000" y="7344000"/>
-            <a:ext cx="792000" cy="252000"/>
+            <a:off x="540000" y="6876000"/>
+            <a:ext cx="864000" cy="288000"/>
           </a:xfrm>
           <a:prstGeom prst="roundRect">
             <a:avLst>
@@ -6549,8 +6526,8 @@
         </p:nvSpPr>
         <p:spPr>
           <a:xfrm>
-            <a:off x="540000" y="7344000"/>
-            <a:ext cx="792000" cy="252000"/>
+            <a:off x="540000" y="6876000"/>
+            <a:ext cx="864000" cy="288000"/>
           </a:xfrm>
           <a:prstGeom prst="rect">
             <a:avLst/>
@@ -6569,48 +6546,7 @@
               </a:lnSpc>
             </a:pPr>
             <a:r>
-              <a:rPr sz="1000" b="1">
-                <a:solidFill>
-                  <a:srgbClr val="D9692F"/>
-                </a:solidFill>
-                <a:latin typeface="Zen Maru Gothic"/>
-                <a:ea typeface="Zen Maru Gothic"/>
-                <a:cs typeface="Zen Maru Gothic"/>
-              </a:rPr>
-              <a:t>対象</a:t>
-            </a:r>
-          </a:p>
-        </p:txBody>
-      </p:sp>
-      <p:sp>
-        <p:nvSpPr>
-          <p:cNvPr id="19" name="内容_対象"/>
-          <p:cNvSpPr txBox="1"/>
-          <p:nvPr/>
-        </p:nvSpPr>
-        <p:spPr>
-          <a:xfrm>
-            <a:off x="1476000" y="7365600"/>
-            <a:ext cx="4032000" cy="432000"/>
-          </a:xfrm>
-          <a:prstGeom prst="rect">
-            <a:avLst/>
-          </a:prstGeom>
-          <a:noFill/>
-        </p:spPr>
-        <p:txBody>
-          <a:bodyPr wrap="square" lIns="0" rIns="0" tIns="0" bIns="0" anchor="t">
-            <a:spAutoFit/>
-          </a:bodyPr>
-          <a:lstStyle/>
-          <a:p>
-            <a:pPr algn="l">
-              <a:lnSpc>
-                <a:spcPct val="120000"/>
-              </a:lnSpc>
-            </a:pPr>
-            <a:r>
-              <a:rPr sz="1050" b="0">
+              <a:rPr sz="1100" b="1">
                 <a:solidFill>
                   <a:srgbClr val="3B332E"/>
                 </a:solidFill>
@@ -6618,7 +6554,48 @@
                 <a:ea typeface="Zen Maru Gothic"/>
                 <a:cs typeface="Zen Maru Gothic"/>
               </a:rPr>
-              <a:t>3〜6さい（未就学のお子さん）</a:t>
+              <a:t>対象</a:t>
+            </a:r>
+          </a:p>
+        </p:txBody>
+      </p:sp>
+      <p:sp>
+        <p:nvSpPr>
+          <p:cNvPr id="19" name="内容_対象"/>
+          <p:cNvSpPr txBox="1"/>
+          <p:nvPr/>
+        </p:nvSpPr>
+        <p:spPr>
+          <a:xfrm>
+            <a:off x="1584000" y="6908400"/>
+            <a:ext cx="5040000" cy="324000"/>
+          </a:xfrm>
+          <a:prstGeom prst="rect">
+            <a:avLst/>
+          </a:prstGeom>
+          <a:noFill/>
+        </p:spPr>
+        <p:txBody>
+          <a:bodyPr wrap="square" lIns="0" rIns="0" tIns="0" bIns="0" anchor="t">
+            <a:spAutoFit/>
+          </a:bodyPr>
+          <a:lstStyle/>
+          <a:p>
+            <a:pPr algn="l">
+              <a:lnSpc>
+                <a:spcPct val="120000"/>
+              </a:lnSpc>
+            </a:pPr>
+            <a:r>
+              <a:rPr sz="1200" b="0">
+                <a:solidFill>
+                  <a:srgbClr val="3B332E"/>
+                </a:solidFill>
+                <a:latin typeface="Zen Maru Gothic"/>
+                <a:ea typeface="Zen Maru Gothic"/>
+                <a:cs typeface="Zen Maru Gothic"/>
+              </a:rPr>
+              <a:t>3さい〜年長さん</a:t>
             </a:r>
           </a:p>
         </p:txBody>
@@ -6631,8 +6608,8 @@
         </p:nvSpPr>
         <p:spPr>
           <a:xfrm>
-            <a:off x="540000" y="7704000"/>
-            <a:ext cx="792000" cy="252000"/>
+            <a:off x="540000" y="7254000"/>
+            <a:ext cx="864000" cy="288000"/>
           </a:xfrm>
           <a:prstGeom prst="roundRect">
             <a:avLst>
@@ -6660,8 +6637,8 @@
         </p:nvSpPr>
         <p:spPr>
           <a:xfrm>
-            <a:off x="540000" y="7704000"/>
-            <a:ext cx="792000" cy="252000"/>
+            <a:off x="540000" y="7254000"/>
+            <a:ext cx="864000" cy="288000"/>
           </a:xfrm>
           <a:prstGeom prst="rect">
             <a:avLst/>
@@ -6680,9 +6657,9 @@
               </a:lnSpc>
             </a:pPr>
             <a:r>
-              <a:rPr sz="1000" b="1">
+              <a:rPr sz="1100" b="1">
                 <a:solidFill>
-                  <a:srgbClr val="D9692F"/>
+                  <a:srgbClr val="3B332E"/>
                 </a:solidFill>
                 <a:latin typeface="Zen Maru Gothic"/>
                 <a:ea typeface="Zen Maru Gothic"/>
@@ -6701,8 +6678,8 @@
         </p:nvSpPr>
         <p:spPr>
           <a:xfrm>
-            <a:off x="1476000" y="7725600"/>
-            <a:ext cx="4032000" cy="432000"/>
+            <a:off x="1584000" y="7286400"/>
+            <a:ext cx="5040000" cy="324000"/>
           </a:xfrm>
           <a:prstGeom prst="rect">
             <a:avLst/>
@@ -6721,7 +6698,7 @@
               </a:lnSpc>
             </a:pPr>
             <a:r>
-              <a:rPr sz="1050" b="0">
+              <a:rPr sz="1200" b="0">
                 <a:solidFill>
                   <a:srgbClr val="3B332E"/>
                 </a:solidFill>
@@ -6742,8 +6719,8 @@
         </p:nvSpPr>
         <p:spPr>
           <a:xfrm>
-            <a:off x="540000" y="8064000"/>
-            <a:ext cx="792000" cy="252000"/>
+            <a:off x="540000" y="7632000"/>
+            <a:ext cx="864000" cy="288000"/>
           </a:xfrm>
           <a:prstGeom prst="roundRect">
             <a:avLst>
@@ -6771,8 +6748,8 @@
         </p:nvSpPr>
         <p:spPr>
           <a:xfrm>
-            <a:off x="540000" y="8064000"/>
-            <a:ext cx="792000" cy="252000"/>
+            <a:off x="540000" y="7632000"/>
+            <a:ext cx="864000" cy="288000"/>
           </a:xfrm>
           <a:prstGeom prst="rect">
             <a:avLst/>
@@ -6791,9 +6768,9 @@
               </a:lnSpc>
             </a:pPr>
             <a:r>
-              <a:rPr sz="1000" b="1">
+              <a:rPr sz="1100" b="1">
                 <a:solidFill>
-                  <a:srgbClr val="D9692F"/>
+                  <a:srgbClr val="3B332E"/>
                 </a:solidFill>
                 <a:latin typeface="Zen Maru Gothic"/>
                 <a:ea typeface="Zen Maru Gothic"/>
@@ -6812,8 +6789,8 @@
         </p:nvSpPr>
         <p:spPr>
           <a:xfrm>
-            <a:off x="1476000" y="8085600"/>
-            <a:ext cx="4032000" cy="432000"/>
+            <a:off x="1584000" y="7664400"/>
+            <a:ext cx="5040000" cy="324000"/>
           </a:xfrm>
           <a:prstGeom prst="rect">
             <a:avLst/>
@@ -6832,7 +6809,7 @@
               </a:lnSpc>
             </a:pPr>
             <a:r>
-              <a:rPr sz="1050" b="0">
+              <a:rPr sz="1200" b="0">
                 <a:solidFill>
                   <a:srgbClr val="3B332E"/>
                 </a:solidFill>
@@ -6853,8 +6830,8 @@
         </p:nvSpPr>
         <p:spPr>
           <a:xfrm>
-            <a:off x="540000" y="8424000"/>
-            <a:ext cx="792000" cy="252000"/>
+            <a:off x="540000" y="8010000"/>
+            <a:ext cx="864000" cy="288000"/>
           </a:xfrm>
           <a:prstGeom prst="roundRect">
             <a:avLst>
@@ -6882,8 +6859,8 @@
         </p:nvSpPr>
         <p:spPr>
           <a:xfrm>
-            <a:off x="540000" y="8424000"/>
-            <a:ext cx="792000" cy="252000"/>
+            <a:off x="540000" y="8010000"/>
+            <a:ext cx="864000" cy="288000"/>
           </a:xfrm>
           <a:prstGeom prst="rect">
             <a:avLst/>
@@ -6902,9 +6879,9 @@
               </a:lnSpc>
             </a:pPr>
             <a:r>
-              <a:rPr sz="1000" b="1">
+              <a:rPr sz="1100" b="1">
                 <a:solidFill>
-                  <a:srgbClr val="D9692F"/>
+                  <a:srgbClr val="3B332E"/>
                 </a:solidFill>
                 <a:latin typeface="Zen Maru Gothic"/>
                 <a:ea typeface="Zen Maru Gothic"/>
@@ -6923,8 +6900,8 @@
         </p:nvSpPr>
         <p:spPr>
           <a:xfrm>
-            <a:off x="1476000" y="8445600"/>
-            <a:ext cx="4032000" cy="432000"/>
+            <a:off x="1584000" y="8042400"/>
+            <a:ext cx="5040000" cy="324000"/>
           </a:xfrm>
           <a:prstGeom prst="rect">
             <a:avLst/>
@@ -6943,7 +6920,7 @@
               </a:lnSpc>
             </a:pPr>
             <a:r>
-              <a:rPr sz="1050" b="0">
+              <a:rPr sz="1200" b="0">
                 <a:solidFill>
                   <a:srgbClr val="3B332E"/>
                 </a:solidFill>
@@ -6964,8 +6941,8 @@
         </p:nvSpPr>
         <p:spPr>
           <a:xfrm>
-            <a:off x="540000" y="8784000"/>
-            <a:ext cx="792000" cy="252000"/>
+            <a:off x="540000" y="8388000"/>
+            <a:ext cx="864000" cy="288000"/>
           </a:xfrm>
           <a:prstGeom prst="roundRect">
             <a:avLst>
@@ -6993,8 +6970,8 @@
         </p:nvSpPr>
         <p:spPr>
           <a:xfrm>
-            <a:off x="540000" y="8784000"/>
-            <a:ext cx="792000" cy="252000"/>
+            <a:off x="540000" y="8388000"/>
+            <a:ext cx="864000" cy="288000"/>
           </a:xfrm>
           <a:prstGeom prst="rect">
             <a:avLst/>
@@ -7013,9 +6990,9 @@
               </a:lnSpc>
             </a:pPr>
             <a:r>
-              <a:rPr sz="1000" b="1">
+              <a:rPr sz="1100" b="1">
                 <a:solidFill>
-                  <a:srgbClr val="D9692F"/>
+                  <a:srgbClr val="3B332E"/>
                 </a:solidFill>
                 <a:latin typeface="Zen Maru Gothic"/>
                 <a:ea typeface="Zen Maru Gothic"/>
@@ -7034,8 +7011,8 @@
         </p:nvSpPr>
         <p:spPr>
           <a:xfrm>
-            <a:off x="1476000" y="8805600"/>
-            <a:ext cx="4032000" cy="432000"/>
+            <a:off x="1584000" y="8420400"/>
+            <a:ext cx="5040000" cy="324000"/>
           </a:xfrm>
           <a:prstGeom prst="rect">
             <a:avLst/>
@@ -7054,7 +7031,7 @@
               </a:lnSpc>
             </a:pPr>
             <a:r>
-              <a:rPr sz="1050" b="0">
+              <a:rPr sz="1200" b="0">
                 <a:solidFill>
                   <a:srgbClr val="3B332E"/>
                 </a:solidFill>
@@ -7075,8 +7052,8 @@
         </p:nvSpPr>
         <p:spPr>
           <a:xfrm>
-            <a:off x="540000" y="9144000"/>
-            <a:ext cx="792000" cy="252000"/>
+            <a:off x="540000" y="8766000"/>
+            <a:ext cx="864000" cy="288000"/>
           </a:xfrm>
           <a:prstGeom prst="roundRect">
             <a:avLst>
@@ -7104,8 +7081,8 @@
         </p:nvSpPr>
         <p:spPr>
           <a:xfrm>
-            <a:off x="540000" y="9144000"/>
-            <a:ext cx="792000" cy="252000"/>
+            <a:off x="540000" y="8766000"/>
+            <a:ext cx="864000" cy="288000"/>
           </a:xfrm>
           <a:prstGeom prst="rect">
             <a:avLst/>
@@ -7124,48 +7101,7 @@
               </a:lnSpc>
             </a:pPr>
             <a:r>
-              <a:rPr sz="1000" b="1">
-                <a:solidFill>
-                  <a:srgbClr val="D9692F"/>
-                </a:solidFill>
-                <a:latin typeface="Zen Maru Gothic"/>
-                <a:ea typeface="Zen Maru Gothic"/>
-                <a:cs typeface="Zen Maru Gothic"/>
-              </a:rPr>
-              <a:t>場所</a:t>
-            </a:r>
-          </a:p>
-        </p:txBody>
-      </p:sp>
-      <p:sp>
-        <p:nvSpPr>
-          <p:cNvPr id="34" name="内容_場所"/>
-          <p:cNvSpPr txBox="1"/>
-          <p:nvPr/>
-        </p:nvSpPr>
-        <p:spPr>
-          <a:xfrm>
-            <a:off x="1476000" y="9165600"/>
-            <a:ext cx="4032000" cy="432000"/>
-          </a:xfrm>
-          <a:prstGeom prst="rect">
-            <a:avLst/>
-          </a:prstGeom>
-          <a:noFill/>
-        </p:spPr>
-        <p:txBody>
-          <a:bodyPr wrap="square" lIns="0" rIns="0" tIns="0" bIns="0" anchor="t">
-            <a:spAutoFit/>
-          </a:bodyPr>
-          <a:lstStyle/>
-          <a:p>
-            <a:pPr algn="l">
-              <a:lnSpc>
-                <a:spcPct val="120000"/>
-              </a:lnSpc>
-            </a:pPr>
-            <a:r>
-              <a:rPr sz="1050" b="0">
+              <a:rPr sz="1100" b="1">
                 <a:solidFill>
                   <a:srgbClr val="3B332E"/>
                 </a:solidFill>
@@ -7173,25 +7109,66 @@
                 <a:ea typeface="Zen Maru Gothic"/>
                 <a:cs typeface="Zen Maru Gothic"/>
               </a:rPr>
-              <a:t>○○市○○町（くわしい場所はお申し込み後にお知らせします）</a:t>
-            </a:r>
-          </a:p>
-        </p:txBody>
-      </p:sp>
-      <p:sp>
-        <p:nvSpPr>
-          <p:cNvPr id="35" name="申込枠"/>
+              <a:t>場所</a:t>
+            </a:r>
+          </a:p>
+        </p:txBody>
+      </p:sp>
+      <p:sp>
+        <p:nvSpPr>
+          <p:cNvPr id="34" name="内容_場所"/>
+          <p:cNvSpPr txBox="1"/>
+          <p:nvPr/>
+        </p:nvSpPr>
+        <p:spPr>
+          <a:xfrm>
+            <a:off x="1584000" y="8798400"/>
+            <a:ext cx="5040000" cy="324000"/>
+          </a:xfrm>
+          <a:prstGeom prst="rect">
+            <a:avLst/>
+          </a:prstGeom>
+          <a:noFill/>
+        </p:spPr>
+        <p:txBody>
+          <a:bodyPr wrap="square" lIns="0" rIns="0" tIns="0" bIns="0" anchor="t">
+            <a:spAutoFit/>
+          </a:bodyPr>
+          <a:lstStyle/>
+          <a:p>
+            <a:pPr algn="l">
+              <a:lnSpc>
+                <a:spcPct val="120000"/>
+              </a:lnSpc>
+            </a:pPr>
+            <a:r>
+              <a:rPr sz="1200" b="0">
+                <a:solidFill>
+                  <a:srgbClr val="3B332E"/>
+                </a:solidFill>
+                <a:latin typeface="Zen Maru Gothic"/>
+                <a:ea typeface="Zen Maru Gothic"/>
+                <a:cs typeface="Zen Maru Gothic"/>
+              </a:rPr>
+              <a:t>○○市○○町（くわしくはお申し込み後に）</a:t>
+            </a:r>
+          </a:p>
+        </p:txBody>
+      </p:sp>
+      <p:sp>
+        <p:nvSpPr>
+          <p:cNvPr id="35" name="申し込み枠"/>
           <p:cNvSpPr/>
           <p:nvPr/>
         </p:nvSpPr>
         <p:spPr>
           <a:xfrm>
-            <a:off x="540000" y="9576000"/>
-            <a:ext cx="5040000" cy="684000"/>
+            <a:off x="540000" y="9216000"/>
+            <a:ext cx="5148000" cy="900000"/>
           </a:xfrm>
           <a:prstGeom prst="roundRect">
             <a:avLst>
-              <a:gd name="adj" fmla="val 25000"/>
+              <a:gd name="adj" fmla="val 20000"/>
             </a:avLst>
           </a:prstGeom>
           <a:solidFill>
@@ -7211,14 +7188,14 @@
       </p:sp>
       <p:sp>
         <p:nvSpPr>
-          <p:cNvPr id="36" name="申込方法"/>
+          <p:cNvPr id="36" name="申し込み方法"/>
           <p:cNvSpPr txBox="1"/>
           <p:nvPr/>
         </p:nvSpPr>
         <p:spPr>
           <a:xfrm>
-            <a:off x="720000" y="9666000"/>
-            <a:ext cx="4752000" cy="576000"/>
+            <a:off x="720000" y="9306000"/>
+            <a:ext cx="4860000" cy="864000"/>
           </a:xfrm>
           <a:prstGeom prst="rect">
             <a:avLst/>
@@ -7233,29 +7210,29 @@
           <a:p>
             <a:pPr algn="l">
               <a:lnSpc>
-                <a:spcPct val="120000"/>
+                <a:spcPct val="125000"/>
               </a:lnSpc>
             </a:pPr>
             <a:r>
-              <a:rPr sz="1050" b="1">
+              <a:rPr sz="1100" b="1">
                 <a:solidFill>
-                  <a:srgbClr val="D9692F"/>
+                  <a:srgbClr val="3B332E"/>
                 </a:solidFill>
                 <a:latin typeface="Zen Maru Gothic"/>
                 <a:ea typeface="Zen Maru Gothic"/>
                 <a:cs typeface="Zen Maru Gothic"/>
               </a:rPr>
-              <a:t>お申し込み　しめきり：1月9日（土）</a:t>
+              <a:t>お申し込み方法　／　しめきり：1月9日（土）</a:t>
             </a:r>
           </a:p>
           <a:p>
             <a:pPr algn="l">
               <a:lnSpc>
-                <a:spcPct val="120000"/>
+                <a:spcPct val="125000"/>
               </a:lnSpc>
             </a:pPr>
             <a:r>
-              <a:rPr sz="950" b="0">
+              <a:rPr sz="1100" b="0">
                 <a:solidFill>
                   <a:srgbClr val="3B332E"/>
                 </a:solidFill>
@@ -7266,6 +7243,24 @@
               <a:t>InstagramのDMかLINEで、「お名前・年齢・希望日」を送ってください</a:t>
             </a:r>
           </a:p>
+          <a:p>
+            <a:pPr algn="l">
+              <a:lnSpc>
+                <a:spcPct val="125000"/>
+              </a:lnSpc>
+            </a:pPr>
+            <a:r>
+              <a:rPr sz="1000" b="0">
+                <a:solidFill>
+                  <a:srgbClr val="3B332E"/>
+                </a:solidFill>
+                <a:latin typeface="Zen Maru Gothic"/>
+                <a:ea typeface="Zen Maru Gothic"/>
+                <a:cs typeface="Zen Maru Gothic"/>
+              </a:rPr>
+              <a:t>見学だけ、保護者の方のご相談だけでも大丈夫です</a:t>
+            </a:r>
+          </a:p>
         </p:txBody>
       </p:sp>
       <p:sp>
@@ -7276,8 +7271,8 @@
         </p:nvSpPr>
         <p:spPr>
           <a:xfrm>
-            <a:off x="5868000" y="9180000"/>
-            <a:ext cx="1152000" cy="1152000"/>
+            <a:off x="5904000" y="9072000"/>
+            <a:ext cx="1044000" cy="1044000"/>
           </a:xfrm>
           <a:prstGeom prst="roundRect">
             <a:avLst>
@@ -7307,8 +7302,8 @@
         </p:nvSpPr>
         <p:spPr>
           <a:xfrm>
-            <a:off x="5868000" y="9180000"/>
-            <a:ext cx="1152000" cy="1152000"/>
+            <a:off x="5904000" y="9072000"/>
+            <a:ext cx="1044000" cy="1044000"/>
           </a:xfrm>
           <a:prstGeom prst="rect">
             <a:avLst/>
@@ -7327,66 +7322,7 @@
               </a:lnSpc>
             </a:pPr>
             <a:r>
-              <a:rPr sz="900" b="0">
-                <a:solidFill>
-                  <a:srgbClr val="D9692F"/>
-                </a:solidFill>
-                <a:latin typeface="Zen Maru Gothic"/>
-                <a:ea typeface="Zen Maru Gothic"/>
-                <a:cs typeface="Zen Maru Gothic"/>
-              </a:rPr>
-              <a:t>QRコード</a:t>
-            </a:r>
-          </a:p>
-          <a:p>
-            <a:pPr algn="ctr">
-              <a:lnSpc>
-                <a:spcPct val="125000"/>
-              </a:lnSpc>
-            </a:pPr>
-            <a:r>
-              <a:rPr sz="900" b="0">
-                <a:solidFill>
-                  <a:srgbClr val="D9692F"/>
-                </a:solidFill>
-                <a:latin typeface="Zen Maru Gothic"/>
-                <a:ea typeface="Zen Maru Gothic"/>
-                <a:cs typeface="Zen Maru Gothic"/>
-              </a:rPr>
-              <a:t>を置く</a:t>
-            </a:r>
-          </a:p>
-        </p:txBody>
-      </p:sp>
-      <p:sp>
-        <p:nvSpPr>
-          <p:cNvPr id="39" name="ひとこと"/>
-          <p:cNvSpPr txBox="1"/>
-          <p:nvPr/>
-        </p:nvSpPr>
-        <p:spPr>
-          <a:xfrm>
-            <a:off x="540000" y="10386000"/>
-            <a:ext cx="5040000" cy="180000"/>
-          </a:xfrm>
-          <a:prstGeom prst="rect">
-            <a:avLst/>
-          </a:prstGeom>
-          <a:noFill/>
-        </p:spPr>
-        <p:txBody>
-          <a:bodyPr wrap="square" lIns="0" rIns="0" tIns="0" bIns="0" anchor="t">
-            <a:spAutoFit/>
-          </a:bodyPr>
-          <a:lstStyle/>
-          <a:p>
-            <a:pPr algn="l">
-              <a:lnSpc>
-                <a:spcPct val="125000"/>
-              </a:lnSpc>
-            </a:pPr>
-            <a:r>
-              <a:rPr sz="850" b="0">
+              <a:rPr sz="1000" b="0">
                 <a:solidFill>
                   <a:srgbClr val="3B332E"/>
                 </a:solidFill>
@@ -7394,7 +7330,25 @@
                 <a:ea typeface="Zen Maru Gothic"/>
                 <a:cs typeface="Zen Maru Gothic"/>
               </a:rPr>
-              <a:t>見学だけ、保護者の方のご相談だけでも大丈夫です</a:t>
+              <a:t>QRコード</a:t>
+            </a:r>
+          </a:p>
+          <a:p>
+            <a:pPr algn="ctr">
+              <a:lnSpc>
+                <a:spcPct val="125000"/>
+              </a:lnSpc>
+            </a:pPr>
+            <a:r>
+              <a:rPr sz="1000" b="0">
+                <a:solidFill>
+                  <a:srgbClr val="3B332E"/>
+                </a:solidFill>
+                <a:latin typeface="Zen Maru Gothic"/>
+                <a:ea typeface="Zen Maru Gothic"/>
+                <a:cs typeface="Zen Maru Gothic"/>
+              </a:rPr>
+              <a:t>を置く</a:t>
             </a:r>
           </a:p>
         </p:txBody>
@@ -7450,8 +7404,8 @@
     </a:clrScheme>
     <a:fontScheme name="Office">
       <a:majorFont>
-        <a:latin typeface="Calibri"/>
-        <a:ea typeface=""/>
+        <a:latin typeface="Zen Maru Gothic"/>
+        <a:ea typeface="Zen Maru Gothic"/>
         <a:cs typeface=""/>
         <a:font script="Jpan" typeface="ＭＳ Ｐゴシック"/>
         <a:font script="Hang" typeface="맑은 고딕"/>
@@ -7485,8 +7439,8 @@
         <a:font script="Geor" typeface="Sylfaen"/>
       </a:majorFont>
       <a:minorFont>
-        <a:latin typeface="Calibri"/>
-        <a:ea typeface=""/>
+        <a:latin typeface="Zen Maru Gothic"/>
+        <a:ea typeface="Zen Maru Gothic"/>
         <a:cs typeface=""/>
         <a:font script="Jpan" typeface="ＭＳ Ｐゴシック"/>
         <a:font script="Hang" typeface="맑은 고딕"/>
